--- a/outputs/History_AI_Research_Report_CN.pptx
+++ b/outputs/History_AI_Research_Report_CN.pptx
@@ -25,6 +25,7 @@
     <p:sldId id="273" r:id="rId24"/>
     <p:sldId id="274" r:id="rId25"/>
     <p:sldId id="275" r:id="rId26"/>
+    <p:sldId id="276" r:id="rId27"/>
   </p:sldIdLst>
   <p:sldSz cx="12191695" cy="6858000" type="screen4x3"/>
   <p:notesSz cx="6858000" cy="9144000"/>
@@ -12742,7 +12743,7 @@
         <p:spPr>
           <a:xfrm>
             <a:off x="0" y="0"/>
-            <a:ext cx="12191695" cy="6858000"/>
+            <a:ext cx="128016" cy="6858000"/>
           </a:xfrm>
           <a:prstGeom prst="rect">
             <a:avLst/>
@@ -12779,14 +12780,94 @@
       </p:sp>
       <p:sp>
         <p:nvSpPr>
-          <p:cNvPr id="3" name="Rectangle 2"/>
+          <p:cNvPr id="3" name="TextBox 2"/>
+          <p:cNvSpPr txBox="1"/>
+          <p:nvPr/>
+        </p:nvSpPr>
+        <p:spPr>
+          <a:xfrm>
+            <a:off x="777240" y="502920"/>
+            <a:ext cx="10058400" cy="256032"/>
+          </a:xfrm>
+          <a:prstGeom prst="rect">
+            <a:avLst/>
+          </a:prstGeom>
+          <a:noFill/>
+        </p:spPr>
+        <p:txBody>
+          <a:bodyPr wrap="square" anchor="t" lIns="0" rIns="0" tIns="0" bIns="0">
+            <a:spAutoFit/>
+          </a:bodyPr>
+          <a:lstStyle/>
+          <a:p>
+            <a:pPr algn="l">
+              <a:lnSpc>
+                <a:spcPct val="115000"/>
+              </a:lnSpc>
+            </a:pPr>
+            <a:r>
+              <a:rPr sz="1050" b="1" i="0">
+                <a:solidFill>
+                  <a:srgbClr val="3A6EA5"/>
+                </a:solidFill>
+                <a:latin typeface="PingFang SC"/>
+                <a:ea typeface="PingFang SC"/>
+              </a:rPr>
+              <a:t>AI 教育 · 研究报告</a:t>
+            </a:r>
+          </a:p>
+        </p:txBody>
+      </p:sp>
+      <p:sp>
+        <p:nvSpPr>
+          <p:cNvPr id="4" name="TextBox 3"/>
+          <p:cNvSpPr txBox="1"/>
+          <p:nvPr/>
+        </p:nvSpPr>
+        <p:spPr>
+          <a:xfrm>
+            <a:off x="777240" y="822960"/>
+            <a:ext cx="10607040" cy="822960"/>
+          </a:xfrm>
+          <a:prstGeom prst="rect">
+            <a:avLst/>
+          </a:prstGeom>
+          <a:noFill/>
+        </p:spPr>
+        <p:txBody>
+          <a:bodyPr wrap="square" anchor="t" lIns="0" rIns="0" tIns="0" bIns="0">
+            <a:spAutoFit/>
+          </a:bodyPr>
+          <a:lstStyle/>
+          <a:p>
+            <a:pPr algn="l">
+              <a:lnSpc>
+                <a:spcPct val="95000"/>
+              </a:lnSpc>
+            </a:pPr>
+            <a:r>
+              <a:rPr sz="2900" b="1" i="0">
+                <a:solidFill>
+                  <a:srgbClr val="1F2A44"/>
+                </a:solidFill>
+                <a:latin typeface="PingFang SC"/>
+                <a:ea typeface="PingFang SC"/>
+              </a:rPr>
+              <a:t>参考文献与数据来源</a:t>
+            </a:r>
+          </a:p>
+        </p:txBody>
+      </p:sp>
+      <p:sp>
+        <p:nvSpPr>
+          <p:cNvPr id="5" name="Rectangle 4"/>
           <p:cNvSpPr/>
           <p:nvPr/>
         </p:nvSpPr>
         <p:spPr>
           <a:xfrm>
-            <a:off x="0" y="0"/>
-            <a:ext cx="182880" cy="6858000"/>
+            <a:off x="777240" y="1664208"/>
+            <a:ext cx="868680" cy="36576"/>
           </a:xfrm>
           <a:prstGeom prst="rect">
             <a:avLst/>
@@ -12823,6 +12904,752 @@
       </p:sp>
       <p:sp>
         <p:nvSpPr>
+          <p:cNvPr id="6" name="TextBox 5"/>
+          <p:cNvSpPr txBox="1"/>
+          <p:nvPr/>
+        </p:nvSpPr>
+        <p:spPr>
+          <a:xfrm>
+            <a:off x="10591495" y="6400800"/>
+            <a:ext cx="822960" cy="274320"/>
+          </a:xfrm>
+          <a:prstGeom prst="rect">
+            <a:avLst/>
+          </a:prstGeom>
+          <a:noFill/>
+        </p:spPr>
+        <p:txBody>
+          <a:bodyPr wrap="square" anchor="t" lIns="0" rIns="0" tIns="0" bIns="0">
+            <a:spAutoFit/>
+          </a:bodyPr>
+          <a:lstStyle/>
+          <a:p>
+            <a:pPr algn="r">
+              <a:lnSpc>
+                <a:spcPct val="115000"/>
+              </a:lnSpc>
+            </a:pPr>
+            <a:r>
+              <a:rPr sz="1000" b="0" i="0">
+                <a:solidFill>
+                  <a:srgbClr val="6B7686"/>
+                </a:solidFill>
+                <a:latin typeface="PingFang SC"/>
+                <a:ea typeface="PingFang SC"/>
+              </a:rPr>
+              <a:t>20</a:t>
+            </a:r>
+          </a:p>
+        </p:txBody>
+      </p:sp>
+      <p:sp>
+        <p:nvSpPr>
+          <p:cNvPr id="7" name="TextBox 6"/>
+          <p:cNvSpPr txBox="1"/>
+          <p:nvPr/>
+        </p:nvSpPr>
+        <p:spPr>
+          <a:xfrm>
+            <a:off x="777240" y="1965960"/>
+            <a:ext cx="457200" cy="274320"/>
+          </a:xfrm>
+          <a:prstGeom prst="rect">
+            <a:avLst/>
+          </a:prstGeom>
+          <a:noFill/>
+        </p:spPr>
+        <p:txBody>
+          <a:bodyPr wrap="square" anchor="t" lIns="0" rIns="0" tIns="0" bIns="0">
+            <a:spAutoFit/>
+          </a:bodyPr>
+          <a:lstStyle/>
+          <a:p>
+            <a:pPr algn="l">
+              <a:lnSpc>
+                <a:spcPct val="115000"/>
+              </a:lnSpc>
+            </a:pPr>
+            <a:r>
+              <a:rPr sz="1050" b="1" i="0">
+                <a:solidFill>
+                  <a:srgbClr val="3A6EA5"/>
+                </a:solidFill>
+                <a:latin typeface="PingFang SC"/>
+                <a:ea typeface="PingFang SC"/>
+              </a:rPr>
+              <a:t>[1]</a:t>
+            </a:r>
+          </a:p>
+        </p:txBody>
+      </p:sp>
+      <p:sp>
+        <p:nvSpPr>
+          <p:cNvPr id="8" name="TextBox 7"/>
+          <p:cNvSpPr txBox="1"/>
+          <p:nvPr/>
+        </p:nvSpPr>
+        <p:spPr>
+          <a:xfrm>
+            <a:off x="1234440" y="1965960"/>
+            <a:ext cx="10058400" cy="566928"/>
+          </a:xfrm>
+          <a:prstGeom prst="rect">
+            <a:avLst/>
+          </a:prstGeom>
+          <a:noFill/>
+        </p:spPr>
+        <p:txBody>
+          <a:bodyPr wrap="square" anchor="t" lIns="0" rIns="0" tIns="0" bIns="0">
+            <a:spAutoFit/>
+          </a:bodyPr>
+          <a:lstStyle/>
+          <a:p>
+            <a:pPr algn="l">
+              <a:lnSpc>
+                <a:spcPct val="135000"/>
+              </a:lnSpc>
+            </a:pPr>
+            <a:r>
+              <a:rPr sz="1050" b="0" i="0">
+                <a:solidFill>
+                  <a:srgbClr val="1B2430"/>
+                </a:solidFill>
+                <a:latin typeface="PingFang SC"/>
+                <a:ea typeface="PingFang SC"/>
+              </a:rPr>
+              <a:t>RAND Corporation（2026-03-17）. More Students Use AI for Homework and Believe It Harms Their Learning. n = 1,214，12–29 岁. rand.org</a:t>
+            </a:r>
+          </a:p>
+        </p:txBody>
+      </p:sp>
+      <p:sp>
+        <p:nvSpPr>
+          <p:cNvPr id="9" name="TextBox 8"/>
+          <p:cNvSpPr txBox="1"/>
+          <p:nvPr/>
+        </p:nvSpPr>
+        <p:spPr>
+          <a:xfrm>
+            <a:off x="777240" y="2587752"/>
+            <a:ext cx="457200" cy="274320"/>
+          </a:xfrm>
+          <a:prstGeom prst="rect">
+            <a:avLst/>
+          </a:prstGeom>
+          <a:noFill/>
+        </p:spPr>
+        <p:txBody>
+          <a:bodyPr wrap="square" anchor="t" lIns="0" rIns="0" tIns="0" bIns="0">
+            <a:spAutoFit/>
+          </a:bodyPr>
+          <a:lstStyle/>
+          <a:p>
+            <a:pPr algn="l">
+              <a:lnSpc>
+                <a:spcPct val="115000"/>
+              </a:lnSpc>
+            </a:pPr>
+            <a:r>
+              <a:rPr sz="1050" b="1" i="0">
+                <a:solidFill>
+                  <a:srgbClr val="3A6EA5"/>
+                </a:solidFill>
+                <a:latin typeface="PingFang SC"/>
+                <a:ea typeface="PingFang SC"/>
+              </a:rPr>
+              <a:t>[2]</a:t>
+            </a:r>
+          </a:p>
+        </p:txBody>
+      </p:sp>
+      <p:sp>
+        <p:nvSpPr>
+          <p:cNvPr id="10" name="TextBox 9"/>
+          <p:cNvSpPr txBox="1"/>
+          <p:nvPr/>
+        </p:nvSpPr>
+        <p:spPr>
+          <a:xfrm>
+            <a:off x="1234440" y="2587752"/>
+            <a:ext cx="10058400" cy="566928"/>
+          </a:xfrm>
+          <a:prstGeom prst="rect">
+            <a:avLst/>
+          </a:prstGeom>
+          <a:noFill/>
+        </p:spPr>
+        <p:txBody>
+          <a:bodyPr wrap="square" anchor="t" lIns="0" rIns="0" tIns="0" bIns="0">
+            <a:spAutoFit/>
+          </a:bodyPr>
+          <a:lstStyle/>
+          <a:p>
+            <a:pPr algn="l">
+              <a:lnSpc>
+                <a:spcPct val="135000"/>
+              </a:lnSpc>
+            </a:pPr>
+            <a:r>
+              <a:rPr sz="1050" b="0" i="0">
+                <a:solidFill>
+                  <a:srgbClr val="1B2430"/>
+                </a:solidFill>
+                <a:latin typeface="PingFang SC"/>
+                <a:ea typeface="PingFang SC"/>
+              </a:rPr>
+              <a:t>HEPI（2025-02）. Student Generative AI Survey 2025. 45% 的学生在学校用过 AI. hepi.ac.uk</a:t>
+            </a:r>
+          </a:p>
+        </p:txBody>
+      </p:sp>
+      <p:sp>
+        <p:nvSpPr>
+          <p:cNvPr id="11" name="TextBox 10"/>
+          <p:cNvSpPr txBox="1"/>
+          <p:nvPr/>
+        </p:nvSpPr>
+        <p:spPr>
+          <a:xfrm>
+            <a:off x="777240" y="3209544"/>
+            <a:ext cx="457200" cy="274320"/>
+          </a:xfrm>
+          <a:prstGeom prst="rect">
+            <a:avLst/>
+          </a:prstGeom>
+          <a:noFill/>
+        </p:spPr>
+        <p:txBody>
+          <a:bodyPr wrap="square" anchor="t" lIns="0" rIns="0" tIns="0" bIns="0">
+            <a:spAutoFit/>
+          </a:bodyPr>
+          <a:lstStyle/>
+          <a:p>
+            <a:pPr algn="l">
+              <a:lnSpc>
+                <a:spcPct val="115000"/>
+              </a:lnSpc>
+            </a:pPr>
+            <a:r>
+              <a:rPr sz="1050" b="1" i="0">
+                <a:solidFill>
+                  <a:srgbClr val="3A6EA5"/>
+                </a:solidFill>
+                <a:latin typeface="PingFang SC"/>
+                <a:ea typeface="PingFang SC"/>
+              </a:rPr>
+              <a:t>[3]</a:t>
+            </a:r>
+          </a:p>
+        </p:txBody>
+      </p:sp>
+      <p:sp>
+        <p:nvSpPr>
+          <p:cNvPr id="12" name="TextBox 11"/>
+          <p:cNvSpPr txBox="1"/>
+          <p:nvPr/>
+        </p:nvSpPr>
+        <p:spPr>
+          <a:xfrm>
+            <a:off x="1234440" y="3209544"/>
+            <a:ext cx="10058400" cy="566928"/>
+          </a:xfrm>
+          <a:prstGeom prst="rect">
+            <a:avLst/>
+          </a:prstGeom>
+          <a:noFill/>
+        </p:spPr>
+        <p:txBody>
+          <a:bodyPr wrap="square" anchor="t" lIns="0" rIns="0" tIns="0" bIns="0">
+            <a:spAutoFit/>
+          </a:bodyPr>
+          <a:lstStyle/>
+          <a:p>
+            <a:pPr algn="l">
+              <a:lnSpc>
+                <a:spcPct val="135000"/>
+              </a:lnSpc>
+            </a:pPr>
+            <a:r>
+              <a:rPr sz="1050" b="0" i="0">
+                <a:solidFill>
+                  <a:srgbClr val="1B2430"/>
+                </a:solidFill>
+                <a:latin typeface="PingFang SC"/>
+                <a:ea typeface="PingFang SC"/>
+              </a:rPr>
+              <a:t>Common Sense Media（2025）. 青少年生成式 AI 使用调查：85% 的 AI 使用者把它用于学业. commonsensemedia.org</a:t>
+            </a:r>
+          </a:p>
+        </p:txBody>
+      </p:sp>
+      <p:sp>
+        <p:nvSpPr>
+          <p:cNvPr id="13" name="TextBox 12"/>
+          <p:cNvSpPr txBox="1"/>
+          <p:nvPr/>
+        </p:nvSpPr>
+        <p:spPr>
+          <a:xfrm>
+            <a:off x="777240" y="3831336"/>
+            <a:ext cx="457200" cy="274320"/>
+          </a:xfrm>
+          <a:prstGeom prst="rect">
+            <a:avLst/>
+          </a:prstGeom>
+          <a:noFill/>
+        </p:spPr>
+        <p:txBody>
+          <a:bodyPr wrap="square" anchor="t" lIns="0" rIns="0" tIns="0" bIns="0">
+            <a:spAutoFit/>
+          </a:bodyPr>
+          <a:lstStyle/>
+          <a:p>
+            <a:pPr algn="l">
+              <a:lnSpc>
+                <a:spcPct val="115000"/>
+              </a:lnSpc>
+            </a:pPr>
+            <a:r>
+              <a:rPr sz="1050" b="1" i="0">
+                <a:solidFill>
+                  <a:srgbClr val="3A6EA5"/>
+                </a:solidFill>
+                <a:latin typeface="PingFang SC"/>
+                <a:ea typeface="PingFang SC"/>
+              </a:rPr>
+              <a:t>[4]</a:t>
+            </a:r>
+          </a:p>
+        </p:txBody>
+      </p:sp>
+      <p:sp>
+        <p:nvSpPr>
+          <p:cNvPr id="14" name="TextBox 13"/>
+          <p:cNvSpPr txBox="1"/>
+          <p:nvPr/>
+        </p:nvSpPr>
+        <p:spPr>
+          <a:xfrm>
+            <a:off x="1234440" y="3831336"/>
+            <a:ext cx="10058400" cy="566928"/>
+          </a:xfrm>
+          <a:prstGeom prst="rect">
+            <a:avLst/>
+          </a:prstGeom>
+          <a:noFill/>
+        </p:spPr>
+        <p:txBody>
+          <a:bodyPr wrap="square" anchor="t" lIns="0" rIns="0" tIns="0" bIns="0">
+            <a:spAutoFit/>
+          </a:bodyPr>
+          <a:lstStyle/>
+          <a:p>
+            <a:pPr algn="l">
+              <a:lnSpc>
+                <a:spcPct val="135000"/>
+              </a:lnSpc>
+            </a:pPr>
+            <a:r>
+              <a:rPr sz="1050" b="0" i="0">
+                <a:solidFill>
+                  <a:srgbClr val="1B2430"/>
+                </a:solidFill>
+                <a:latin typeface="PingFang SC"/>
+                <a:ea typeface="PingFang SC"/>
+              </a:rPr>
+              <a:t>National Literacy Trust（2025-08）. Young people and teachers' use of generative AI：43.2% 教师担忧（+7.5pp）. literacytrust.org.uk</a:t>
+            </a:r>
+          </a:p>
+        </p:txBody>
+      </p:sp>
+      <p:sp>
+        <p:nvSpPr>
+          <p:cNvPr id="15" name="TextBox 14"/>
+          <p:cNvSpPr txBox="1"/>
+          <p:nvPr/>
+        </p:nvSpPr>
+        <p:spPr>
+          <a:xfrm>
+            <a:off x="777240" y="4453128"/>
+            <a:ext cx="457200" cy="274320"/>
+          </a:xfrm>
+          <a:prstGeom prst="rect">
+            <a:avLst/>
+          </a:prstGeom>
+          <a:noFill/>
+        </p:spPr>
+        <p:txBody>
+          <a:bodyPr wrap="square" anchor="t" lIns="0" rIns="0" tIns="0" bIns="0">
+            <a:spAutoFit/>
+          </a:bodyPr>
+          <a:lstStyle/>
+          <a:p>
+            <a:pPr algn="l">
+              <a:lnSpc>
+                <a:spcPct val="115000"/>
+              </a:lnSpc>
+            </a:pPr>
+            <a:r>
+              <a:rPr sz="1050" b="1" i="0">
+                <a:solidFill>
+                  <a:srgbClr val="3A6EA5"/>
+                </a:solidFill>
+                <a:latin typeface="PingFang SC"/>
+                <a:ea typeface="PingFang SC"/>
+              </a:rPr>
+              <a:t>[5]</a:t>
+            </a:r>
+          </a:p>
+        </p:txBody>
+      </p:sp>
+      <p:sp>
+        <p:nvSpPr>
+          <p:cNvPr id="16" name="TextBox 15"/>
+          <p:cNvSpPr txBox="1"/>
+          <p:nvPr/>
+        </p:nvSpPr>
+        <p:spPr>
+          <a:xfrm>
+            <a:off x="1234440" y="4453128"/>
+            <a:ext cx="10058400" cy="566928"/>
+          </a:xfrm>
+          <a:prstGeom prst="rect">
+            <a:avLst/>
+          </a:prstGeom>
+          <a:noFill/>
+        </p:spPr>
+        <p:txBody>
+          <a:bodyPr wrap="square" anchor="t" lIns="0" rIns="0" tIns="0" bIns="0">
+            <a:spAutoFit/>
+          </a:bodyPr>
+          <a:lstStyle/>
+          <a:p>
+            <a:pPr algn="l">
+              <a:lnSpc>
+                <a:spcPct val="135000"/>
+              </a:lnSpc>
+            </a:pPr>
+            <a:r>
+              <a:rPr sz="1050" b="0" i="0">
+                <a:solidFill>
+                  <a:srgbClr val="1B2430"/>
+                </a:solidFill>
+                <a:latin typeface="PingFang SC"/>
+                <a:ea typeface="PingFang SC"/>
+              </a:rPr>
+              <a:t>CSBA Blog（2026-04）. Students express mixed feelings on AI use for homework. blog.csba.org</a:t>
+            </a:r>
+          </a:p>
+        </p:txBody>
+      </p:sp>
+      <p:sp>
+        <p:nvSpPr>
+          <p:cNvPr id="17" name="TextBox 16"/>
+          <p:cNvSpPr txBox="1"/>
+          <p:nvPr/>
+        </p:nvSpPr>
+        <p:spPr>
+          <a:xfrm>
+            <a:off x="777240" y="5074920"/>
+            <a:ext cx="457200" cy="274320"/>
+          </a:xfrm>
+          <a:prstGeom prst="rect">
+            <a:avLst/>
+          </a:prstGeom>
+          <a:noFill/>
+        </p:spPr>
+        <p:txBody>
+          <a:bodyPr wrap="square" anchor="t" lIns="0" rIns="0" tIns="0" bIns="0">
+            <a:spAutoFit/>
+          </a:bodyPr>
+          <a:lstStyle/>
+          <a:p>
+            <a:pPr algn="l">
+              <a:lnSpc>
+                <a:spcPct val="115000"/>
+              </a:lnSpc>
+            </a:pPr>
+            <a:r>
+              <a:rPr sz="1050" b="1" i="0">
+                <a:solidFill>
+                  <a:srgbClr val="3A6EA5"/>
+                </a:solidFill>
+                <a:latin typeface="PingFang SC"/>
+                <a:ea typeface="PingFang SC"/>
+              </a:rPr>
+              <a:t>[6]</a:t>
+            </a:r>
+          </a:p>
+        </p:txBody>
+      </p:sp>
+      <p:sp>
+        <p:nvSpPr>
+          <p:cNvPr id="18" name="TextBox 17"/>
+          <p:cNvSpPr txBox="1"/>
+          <p:nvPr/>
+        </p:nvSpPr>
+        <p:spPr>
+          <a:xfrm>
+            <a:off x="1234440" y="5074920"/>
+            <a:ext cx="10058400" cy="566928"/>
+          </a:xfrm>
+          <a:prstGeom prst="rect">
+            <a:avLst/>
+          </a:prstGeom>
+          <a:noFill/>
+        </p:spPr>
+        <p:txBody>
+          <a:bodyPr wrap="square" anchor="t" lIns="0" rIns="0" tIns="0" bIns="0">
+            <a:spAutoFit/>
+          </a:bodyPr>
+          <a:lstStyle/>
+          <a:p>
+            <a:pPr algn="l">
+              <a:lnSpc>
+                <a:spcPct val="135000"/>
+              </a:lnSpc>
+            </a:pPr>
+            <a:r>
+              <a:rPr sz="1050" b="0" i="0">
+                <a:solidFill>
+                  <a:srgbClr val="1B2430"/>
+                </a:solidFill>
+                <a:latin typeface="PingFang SC"/>
+                <a:ea typeface="PingFang SC"/>
+              </a:rPr>
+              <a:t>Central Florida Public Media（2026-06）. 教师民调：54% 认为 AI 让批判性思考更难学.</a:t>
+            </a:r>
+          </a:p>
+        </p:txBody>
+      </p:sp>
+      <p:sp>
+        <p:nvSpPr>
+          <p:cNvPr id="19" name="TextBox 18"/>
+          <p:cNvSpPr txBox="1"/>
+          <p:nvPr/>
+        </p:nvSpPr>
+        <p:spPr>
+          <a:xfrm>
+            <a:off x="777240" y="5696712"/>
+            <a:ext cx="457200" cy="274320"/>
+          </a:xfrm>
+          <a:prstGeom prst="rect">
+            <a:avLst/>
+          </a:prstGeom>
+          <a:noFill/>
+        </p:spPr>
+        <p:txBody>
+          <a:bodyPr wrap="square" anchor="t" lIns="0" rIns="0" tIns="0" bIns="0">
+            <a:spAutoFit/>
+          </a:bodyPr>
+          <a:lstStyle/>
+          <a:p>
+            <a:pPr algn="l">
+              <a:lnSpc>
+                <a:spcPct val="115000"/>
+              </a:lnSpc>
+            </a:pPr>
+            <a:r>
+              <a:rPr sz="1050" b="1" i="0">
+                <a:solidFill>
+                  <a:srgbClr val="3A6EA5"/>
+                </a:solidFill>
+                <a:latin typeface="PingFang SC"/>
+                <a:ea typeface="PingFang SC"/>
+              </a:rPr>
+              <a:t>[7]</a:t>
+            </a:r>
+          </a:p>
+        </p:txBody>
+      </p:sp>
+      <p:sp>
+        <p:nvSpPr>
+          <p:cNvPr id="20" name="TextBox 19"/>
+          <p:cNvSpPr txBox="1"/>
+          <p:nvPr/>
+        </p:nvSpPr>
+        <p:spPr>
+          <a:xfrm>
+            <a:off x="1234440" y="5696712"/>
+            <a:ext cx="10058400" cy="566928"/>
+          </a:xfrm>
+          <a:prstGeom prst="rect">
+            <a:avLst/>
+          </a:prstGeom>
+          <a:noFill/>
+        </p:spPr>
+        <p:txBody>
+          <a:bodyPr wrap="square" anchor="t" lIns="0" rIns="0" tIns="0" bIns="0">
+            <a:spAutoFit/>
+          </a:bodyPr>
+          <a:lstStyle/>
+          <a:p>
+            <a:pPr algn="l">
+              <a:lnSpc>
+                <a:spcPct val="135000"/>
+              </a:lnSpc>
+            </a:pPr>
+            <a:r>
+              <a:rPr sz="1050" b="0" i="0">
+                <a:solidFill>
+                  <a:srgbClr val="1B2430"/>
+                </a:solidFill>
+                <a:latin typeface="PingFang SC"/>
+                <a:ea typeface="PingFang SC"/>
+              </a:rPr>
+              <a:t>RAND（2026-03）. 学生担忧比例 54% → 67%；聊天机器人使用率 60%（ChatGPT 53%、Gemini 28%）.</a:t>
+            </a:r>
+          </a:p>
+        </p:txBody>
+      </p:sp>
+      <p:sp>
+        <p:nvSpPr>
+          <p:cNvPr id="21" name="TextBox 20"/>
+          <p:cNvSpPr txBox="1"/>
+          <p:nvPr/>
+        </p:nvSpPr>
+        <p:spPr>
+          <a:xfrm>
+            <a:off x="777240" y="6291072"/>
+            <a:ext cx="10424160" cy="274320"/>
+          </a:xfrm>
+          <a:prstGeom prst="rect">
+            <a:avLst/>
+          </a:prstGeom>
+          <a:noFill/>
+        </p:spPr>
+        <p:txBody>
+          <a:bodyPr wrap="square" anchor="t" lIns="0" rIns="0" tIns="0" bIns="0">
+            <a:spAutoFit/>
+          </a:bodyPr>
+          <a:lstStyle/>
+          <a:p>
+            <a:pPr algn="l">
+              <a:lnSpc>
+                <a:spcPct val="115000"/>
+              </a:lnSpc>
+            </a:pPr>
+            <a:r>
+              <a:rPr sz="900" b="0" i="0">
+                <a:solidFill>
+                  <a:srgbClr val="6B7686"/>
+                </a:solidFill>
+                <a:latin typeface="PingFang SC"/>
+                <a:ea typeface="PingFang SC"/>
+              </a:rPr>
+              <a:t>检索日期：2026-10-28。数字以原文为准；不同调查对「使用 AI」的定义不同（16%–85%）。</a:t>
+            </a:r>
+          </a:p>
+        </p:txBody>
+      </p:sp>
+    </p:spTree>
+  </p:cSld>
+  <p:clrMapOvr>
+    <a:masterClrMapping/>
+  </p:clrMapOvr>
+</p:sld>
+</file>
+
+<file path=ppt/slides/slide21.xml><?xml version="1.0" encoding="utf-8"?>
+<p:sld xmlns:a="http://schemas.openxmlformats.org/drawingml/2006/main" xmlns:p="http://schemas.openxmlformats.org/presentationml/2006/main" xmlns:r="http://schemas.openxmlformats.org/officeDocument/2006/relationships">
+  <p:cSld>
+    <p:spTree>
+      <p:nvGrpSpPr>
+        <p:cNvPr id="1" name=""/>
+        <p:cNvGrpSpPr/>
+        <p:nvPr/>
+      </p:nvGrpSpPr>
+      <p:grpSpPr/>
+      <p:sp>
+        <p:nvSpPr>
+          <p:cNvPr id="2" name="Rectangle 1"/>
+          <p:cNvSpPr/>
+          <p:nvPr/>
+        </p:nvSpPr>
+        <p:spPr>
+          <a:xfrm>
+            <a:off x="0" y="0"/>
+            <a:ext cx="12191695" cy="6858000"/>
+          </a:xfrm>
+          <a:prstGeom prst="rect">
+            <a:avLst/>
+          </a:prstGeom>
+          <a:solidFill>
+            <a:srgbClr val="1F2A44"/>
+          </a:solidFill>
+          <a:ln>
+            <a:noFill/>
+          </a:ln>
+          <a:effectLst/>
+        </p:spPr>
+        <p:style>
+          <a:lnRef idx="1">
+            <a:schemeClr val="accent1"/>
+          </a:lnRef>
+          <a:fillRef idx="3">
+            <a:schemeClr val="accent1"/>
+          </a:fillRef>
+          <a:effectRef idx="2">
+            <a:schemeClr val="accent1"/>
+          </a:effectRef>
+          <a:fontRef idx="minor">
+            <a:schemeClr val="lt1"/>
+          </a:fontRef>
+        </p:style>
+        <p:txBody>
+          <a:bodyPr rtlCol="0" anchor="ctr"/>
+          <a:lstStyle/>
+          <a:p>
+            <a:pPr algn="ctr"/>
+          </a:p>
+        </p:txBody>
+      </p:sp>
+      <p:sp>
+        <p:nvSpPr>
+          <p:cNvPr id="3" name="Rectangle 2"/>
+          <p:cNvSpPr/>
+          <p:nvPr/>
+        </p:nvSpPr>
+        <p:spPr>
+          <a:xfrm>
+            <a:off x="0" y="0"/>
+            <a:ext cx="182880" cy="6858000"/>
+          </a:xfrm>
+          <a:prstGeom prst="rect">
+            <a:avLst/>
+          </a:prstGeom>
+          <a:solidFill>
+            <a:srgbClr val="3A6EA5"/>
+          </a:solidFill>
+          <a:ln>
+            <a:noFill/>
+          </a:ln>
+          <a:effectLst/>
+        </p:spPr>
+        <p:style>
+          <a:lnRef idx="1">
+            <a:schemeClr val="accent1"/>
+          </a:lnRef>
+          <a:fillRef idx="3">
+            <a:schemeClr val="accent1"/>
+          </a:fillRef>
+          <a:effectRef idx="2">
+            <a:schemeClr val="accent1"/>
+          </a:effectRef>
+          <a:fontRef idx="minor">
+            <a:schemeClr val="lt1"/>
+          </a:fontRef>
+        </p:style>
+        <p:txBody>
+          <a:bodyPr rtlCol="0" anchor="ctr"/>
+          <a:lstStyle/>
+          <a:p>
+            <a:pPr algn="ctr"/>
+          </a:p>
+        </p:txBody>
+      </p:sp>
+      <p:sp>
+        <p:nvSpPr>
           <p:cNvPr id="4" name="TextBox 3"/>
           <p:cNvSpPr txBox="1"/>
           <p:nvPr/>
@@ -12936,7 +13763,7 @@
                 <a:latin typeface="PingFang SC"/>
                 <a:ea typeface="PingFang SC"/>
               </a:rPr>
-              <a:t>20</a:t>
+              <a:t>21</a:t>
             </a:r>
           </a:p>
         </p:txBody>
@@ -13401,6 +14228,46 @@
         </p:nvSpPr>
         <p:spPr>
           <a:xfrm>
+            <a:off x="777240" y="5577840"/>
+            <a:ext cx="10424160" cy="502920"/>
+          </a:xfrm>
+          <a:prstGeom prst="rect">
+            <a:avLst/>
+          </a:prstGeom>
+          <a:noFill/>
+        </p:spPr>
+        <p:txBody>
+          <a:bodyPr wrap="square" anchor="t" lIns="0" rIns="0" tIns="0" bIns="0">
+            <a:spAutoFit/>
+          </a:bodyPr>
+          <a:lstStyle/>
+          <a:p>
+            <a:pPr algn="l">
+              <a:lnSpc>
+                <a:spcPct val="130000"/>
+              </a:lnSpc>
+            </a:pPr>
+            <a:r>
+              <a:rPr sz="1150" b="0" i="0">
+                <a:solidFill>
+                  <a:srgbClr val="6B7686"/>
+                </a:solidFill>
+                <a:latin typeface="PingFang SC"/>
+                <a:ea typeface="PingFang SC"/>
+              </a:rPr>
+              <a:t>怎么读：同一批 12–29 岁青少年（n=1,214）在 7 个月内，用 AI 做作业的比例从 48% 升到 62%。</a:t>
+            </a:r>
+          </a:p>
+        </p:txBody>
+      </p:sp>
+      <p:sp>
+        <p:nvSpPr>
+          <p:cNvPr id="14" name="TextBox 13"/>
+          <p:cNvSpPr txBox="1"/>
+          <p:nvPr/>
+        </p:nvSpPr>
+        <p:spPr>
+          <a:xfrm>
             <a:off x="777240" y="6419088"/>
             <a:ext cx="10241280" cy="274320"/>
           </a:xfrm>
@@ -13428,7 +14295,7 @@
                 <a:latin typeface="PingFang SC"/>
                 <a:ea typeface="PingFang SC"/>
               </a:rPr>
-              <a:t>Sources: RAND (2026-03, n=1,214), HEPI (2025-02), Common Sense Media (2025)</a:t>
+              <a:t>RAND, “More Students Use AI for Homework…” (2026-03-17, n=1,214) · HEPI, Student Generative AI Survey (2025-02) · Common Sense Media (2025)</a:t>
             </a:r>
           </a:p>
         </p:txBody>
@@ -13788,6 +14655,46 @@
         </p:nvSpPr>
         <p:spPr>
           <a:xfrm>
+            <a:off x="777240" y="5212079"/>
+            <a:ext cx="10424160" cy="502920"/>
+          </a:xfrm>
+          <a:prstGeom prst="rect">
+            <a:avLst/>
+          </a:prstGeom>
+          <a:noFill/>
+        </p:spPr>
+        <p:txBody>
+          <a:bodyPr wrap="square" anchor="t" lIns="0" rIns="0" tIns="0" bIns="0">
+            <a:spAutoFit/>
+          </a:bodyPr>
+          <a:lstStyle/>
+          <a:p>
+            <a:pPr algn="l">
+              <a:lnSpc>
+                <a:spcPct val="130000"/>
+              </a:lnSpc>
+            </a:pPr>
+            <a:r>
+              <a:rPr sz="1150" b="0" i="0">
+                <a:solidFill>
+                  <a:srgbClr val="6B7686"/>
+                </a:solidFill>
+                <a:latin typeface="PingFang SC"/>
+                <a:ea typeface="PingFang SC"/>
+              </a:rPr>
+              <a:t>怎么读：三种高频用途都是「让 AI 产出内容」，而不是「让 AI 检验我的判断」。</a:t>
+            </a:r>
+          </a:p>
+        </p:txBody>
+      </p:sp>
+      <p:sp>
+        <p:nvSpPr>
+          <p:cNvPr id="11" name="TextBox 10"/>
+          <p:cNvSpPr txBox="1"/>
+          <p:nvPr/>
+        </p:nvSpPr>
+        <p:spPr>
+          <a:xfrm>
             <a:off x="777240" y="6419088"/>
             <a:ext cx="10241280" cy="274320"/>
           </a:xfrm>
@@ -13815,7 +14722,7 @@
                 <a:latin typeface="PingFang SC"/>
                 <a:ea typeface="PingFang SC"/>
               </a:rPr>
-              <a:t>Source: CSBA Blog citing a 2026 student survey</a:t>
+              <a:t>RAND (2026-03-17). Uses: explanations 38%, brainstorming 35%, fact lookup 33%.</a:t>
             </a:r>
           </a:p>
         </p:txBody>
@@ -13957,7 +14864,7 @@
                 <a:latin typeface="PingFang SC"/>
                 <a:ea typeface="PingFang SC"/>
               </a:rPr>
-              <a:t>老师担心的不是用不用，而是还思不思考</a:t>
+              <a:t>担忧在两端同时上升</a:t>
             </a:r>
           </a:p>
         </p:txBody>
@@ -14173,7 +15080,7 @@
                 <a:latin typeface="PingFang SC"/>
                 <a:ea typeface="PingFang SC"/>
               </a:rPr>
-              <a:t>54%</a:t>
+              <a:t>67%</a:t>
             </a:r>
           </a:p>
         </p:txBody>
@@ -14213,7 +15120,24 @@
                 <a:latin typeface="PingFang SC"/>
                 <a:ea typeface="PingFang SC"/>
               </a:rPr>
-              <a:t>老师说 AI 让思考变难</a:t>
+              <a:t>学生担心 AI 损害批判性思维</a:t>
+            </a:r>
+          </a:p>
+          <a:p>
+            <a:pPr algn="l">
+              <a:lnSpc>
+                <a:spcPct val="130000"/>
+              </a:lnSpc>
+            </a:pPr>
+            <a:r>
+              <a:rPr sz="1250" b="0" i="0">
+                <a:solidFill>
+                  <a:srgbClr val="1B2430"/>
+                </a:solidFill>
+                <a:latin typeface="PingFang SC"/>
+                <a:ea typeface="PingFang SC"/>
+              </a:rPr>
+              <a:t>（2025 年初为 54%）</a:t>
             </a:r>
           </a:p>
         </p:txBody>
@@ -14385,7 +15309,24 @@
                 <a:latin typeface="PingFang SC"/>
                 <a:ea typeface="PingFang SC"/>
               </a:rPr>
-              <a:t>老师担心学生用 AI</a:t>
+              <a:t>老师担心学生用生成式 AI</a:t>
+            </a:r>
+          </a:p>
+          <a:p>
+            <a:pPr algn="l">
+              <a:lnSpc>
+                <a:spcPct val="130000"/>
+              </a:lnSpc>
+            </a:pPr>
+            <a:r>
+              <a:rPr sz="1250" b="0" i="0">
+                <a:solidFill>
+                  <a:srgbClr val="1B2430"/>
+                </a:solidFill>
+                <a:latin typeface="PingFang SC"/>
+                <a:ea typeface="PingFang SC"/>
+              </a:rPr>
+              <a:t>（同比 +7.5pp）</a:t>
             </a:r>
           </a:p>
         </p:txBody>
@@ -14517,7 +15458,7 @@
                 <a:latin typeface="PingFang SC"/>
                 <a:ea typeface="PingFang SC"/>
               </a:rPr>
-              <a:t>66%</a:t>
+              <a:t>54%</a:t>
             </a:r>
           </a:p>
         </p:txBody>
@@ -14557,7 +15498,24 @@
                 <a:latin typeface="PingFang SC"/>
                 <a:ea typeface="PingFang SC"/>
               </a:rPr>
-              <a:t>英格兰中学老师担心</a:t>
+              <a:t>老师认为 AI 让思考更难学</a:t>
+            </a:r>
+          </a:p>
+          <a:p>
+            <a:pPr algn="l">
+              <a:lnSpc>
+                <a:spcPct val="130000"/>
+              </a:lnSpc>
+            </a:pPr>
+            <a:r>
+              <a:rPr sz="1250" b="0" i="0">
+                <a:solidFill>
+                  <a:srgbClr val="1B2430"/>
+                </a:solidFill>
+                <a:latin typeface="PingFang SC"/>
+                <a:ea typeface="PingFang SC"/>
+              </a:rPr>
+              <a:t>（2026 教师民调）</a:t>
             </a:r>
           </a:p>
         </p:txBody>
@@ -14565,6 +15523,46 @@
       <p:sp>
         <p:nvSpPr>
           <p:cNvPr id="19" name="TextBox 18"/>
+          <p:cNvSpPr txBox="1"/>
+          <p:nvPr/>
+        </p:nvSpPr>
+        <p:spPr>
+          <a:xfrm>
+            <a:off x="777240" y="4572000"/>
+            <a:ext cx="10424160" cy="502920"/>
+          </a:xfrm>
+          <a:prstGeom prst="rect">
+            <a:avLst/>
+          </a:prstGeom>
+          <a:noFill/>
+        </p:spPr>
+        <p:txBody>
+          <a:bodyPr wrap="square" anchor="t" lIns="0" rIns="0" tIns="0" bIns="0">
+            <a:spAutoFit/>
+          </a:bodyPr>
+          <a:lstStyle/>
+          <a:p>
+            <a:pPr algn="l">
+              <a:lnSpc>
+                <a:spcPct val="130000"/>
+              </a:lnSpc>
+            </a:pPr>
+            <a:r>
+              <a:rPr sz="1150" b="0" i="0">
+                <a:solidFill>
+                  <a:srgbClr val="6B7686"/>
+                </a:solidFill>
+                <a:latin typeface="PingFang SC"/>
+                <a:ea typeface="PingFang SC"/>
+              </a:rPr>
+              <a:t>怎么读：三项独立调查从不同角度指向同一件事——学生和教师的担忧都在上升。</a:t>
+            </a:r>
+          </a:p>
+        </p:txBody>
+      </p:sp>
+      <p:sp>
+        <p:nvSpPr>
+          <p:cNvPr id="20" name="TextBox 19"/>
           <p:cNvSpPr txBox="1"/>
           <p:nvPr/>
         </p:nvSpPr>
@@ -14597,7 +15595,7 @@
                 <a:latin typeface="PingFang SC"/>
                 <a:ea typeface="PingFang SC"/>
               </a:rPr>
-              <a:t>Sources: teacher poll (2026-06), National Literacy Trust (2025-08), England survey (2026)</a:t>
+              <a:t>RAND (2026-03) · National Literacy Trust (2025-08) · teacher poll reported by Central Florida Public Media (2026-06)</a:t>
             </a:r>
           </a:p>
         </p:txBody>
@@ -17353,6 +18351,46 @@
       <p:sp>
         <p:nvSpPr>
           <p:cNvPr id="20" name="TextBox 19"/>
+          <p:cNvSpPr txBox="1"/>
+          <p:nvPr/>
+        </p:nvSpPr>
+        <p:spPr>
+          <a:xfrm>
+            <a:off x="7635240" y="2286000"/>
+            <a:ext cx="3840480" cy="1371600"/>
+          </a:xfrm>
+          <a:prstGeom prst="rect">
+            <a:avLst/>
+          </a:prstGeom>
+          <a:noFill/>
+        </p:spPr>
+        <p:txBody>
+          <a:bodyPr wrap="square" anchor="t" lIns="0" rIns="0" tIns="0" bIns="0">
+            <a:spAutoFit/>
+          </a:bodyPr>
+          <a:lstStyle/>
+          <a:p>
+            <a:pPr algn="l">
+              <a:lnSpc>
+                <a:spcPct val="135000"/>
+              </a:lnSpc>
+            </a:pPr>
+            <a:r>
+              <a:rPr sz="1100" b="0" i="0">
+                <a:solidFill>
+                  <a:srgbClr val="6B7686"/>
+                </a:solidFill>
+                <a:latin typeface="PingFang SC"/>
+                <a:ea typeface="PingFang SC"/>
+              </a:rPr>
+              <a:t>怎么读：横轴是 AI 的角色，纵轴是学科。现有工作集中在左半边，我们做右下角。</a:t>
+            </a:r>
+          </a:p>
+        </p:txBody>
+      </p:sp>
+      <p:sp>
+        <p:nvSpPr>
+          <p:cNvPr id="21" name="TextBox 20"/>
           <p:cNvSpPr txBox="1"/>
           <p:nvPr/>
         </p:nvSpPr>
